--- a/download/Программа_развития_Эмпилс_2026-2028_обновлено.pptx
+++ b/download/Программа_развития_Эмпилс_2026-2028_обновлено.pptx
@@ -22,7 +22,6 @@
     <p:sldId id="264" r:id="rId13"/>
     <p:sldId id="269" r:id="rId14"/>
     <p:sldId id="270" r:id="rId15"/>
-    <p:sldId id="287" r:id="rId21"/>
   </p:sldIdLst>
   <p:sldSz cx="9144000" cy="5143500" type="screen16x9"/>
   <p:notesSz cx="5143500" cy="9144000"/>
@@ -9697,9 +9696,20 @@
   <p:cSld name="Slide 15">
     <p:bg>
       <p:bgPr>
-        <a:solidFill>
-          <a:srgbClr val="FFFFFF"/>
-        </a:solidFill>
+        <a:gradFill>
+          <a:gsLst>
+            <a:gs pos="0">
+              <a:srgbClr val="0A1628"/>
+            </a:gs>
+            <a:gs pos="50000">
+              <a:srgbClr val="0D2137"/>
+            </a:gs>
+            <a:gs pos="100000">
+              <a:srgbClr val="112D4E"/>
+            </a:gs>
+          </a:gsLst>
+          <a:lin ang="5400000" scaled="1"/>
+        </a:gradFill>
         <a:effectLst/>
       </p:bgPr>
     </p:bg>
@@ -9719,319 +9729,14 @@
       </p:grpSpPr>
       <p:sp>
         <p:nvSpPr>
-          <p:cNvPr id="2" name="Text 0"/>
-          <p:cNvSpPr/>
-          <p:nvPr/>
-        </p:nvSpPr>
-        <p:spPr>
-          <a:xfrm>
-            <a:off x="457200" y="457200"/>
-            <a:ext cx="342900" cy="28575"/>
-          </a:xfrm>
-          <a:prstGeom prst="roundRect">
-            <a:avLst>
-              <a:gd name="adj" fmla="val 66667"/>
-            </a:avLst>
-          </a:prstGeom>
-          <a:solidFill>
-            <a:srgbClr val="00B4D8"/>
-          </a:solidFill>
-          <a:ln/>
-        </p:spPr>
-        <p:txBody>
-          <a:bodyPr wrap="square" rtlCol="0" anchor="ctr"/>
-          <a:lstStyle/>
-          <a:p>
-            <a:pPr marL="0" indent="0">
-              <a:buNone/>
-            </a:pPr>
-            <a:endParaRPr lang="en-US" dirty="0"/>
-          </a:p>
-        </p:txBody>
-      </p:sp>
-      <p:sp>
-        <p:nvSpPr>
-          <p:cNvPr id="3" name="Text 1"/>
-          <p:cNvSpPr/>
-          <p:nvPr/>
-        </p:nvSpPr>
-        <p:spPr>
-          <a:xfrm>
-            <a:off x="885825" y="400050"/>
-            <a:ext cx="7800975" cy="156754"/>
-          </a:xfrm>
-          <a:prstGeom prst="rect">
-            <a:avLst/>
-          </a:prstGeom>
-          <a:noFill/>
-          <a:ln/>
-        </p:spPr>
-        <p:txBody>
-          <a:bodyPr wrap="none" lIns="0" tIns="0" rIns="0" bIns="0" rtlCol="0" anchor="t"/>
-          <a:lstStyle/>
-          <a:p>
-            <a:pPr marL="0" indent="0" algn="l">
-              <a:lnSpc>
-                <a:spcPts val="1125"/>
-              </a:lnSpc>
-              <a:buNone/>
-            </a:pPr>
-            <a:r>
-              <a:rPr lang="en-US" sz="800" kern="0" spc="39" dirty="0">
-                <a:solidFill>
-                  <a:srgbClr val="00B4D8"/>
-                </a:solidFill>
-                <a:latin typeface="Carlito" pitchFamily="34" charset="0"/>
-                <a:ea typeface="Carlito" pitchFamily="34" charset="-122"/>
-                <a:cs typeface="Carlito" pitchFamily="34" charset="-120"/>
-              </a:rPr>
-              <a:t>СЛЕДУЮЩИЕ ШАГИ</a:t>
-            </a:r>
-            <a:endParaRPr lang="en-US" sz="800" dirty="0"/>
-          </a:p>
-        </p:txBody>
-      </p:sp>
-      <p:sp>
-        <p:nvSpPr>
-          <p:cNvPr id="4" name="Text 2"/>
-          <p:cNvSpPr/>
-          <p:nvPr/>
-        </p:nvSpPr>
-        <p:spPr>
-          <a:xfrm>
-            <a:off x="457200" y="600075"/>
-            <a:ext cx="8636000" cy="277749"/>
-          </a:xfrm>
-          <a:prstGeom prst="rect">
-            <a:avLst/>
-          </a:prstGeom>
-          <a:noFill/>
-          <a:ln/>
-        </p:spPr>
-        <p:txBody>
-          <a:bodyPr wrap="square" lIns="0" tIns="0" rIns="0" bIns="0" rtlCol="0" anchor="t"/>
-          <a:lstStyle/>
-          <a:p>
-            <a:pPr marL="0" indent="0" algn="l">
-              <a:lnSpc>
-                <a:spcPts val="2025"/>
-              </a:lnSpc>
-              <a:buNone/>
-            </a:pPr>
-            <a:r>
-              <a:rPr sz="1700" b="1">
-                <a:solidFill>
-                  <a:srgbClr val="0A2540"/>
-                </a:solidFill>
-                <a:latin typeface="Carlito"/>
-              </a:rPr>
-              <a:t>Что делать прямо сейчас:</a:t>
-            </a:r>
-            <a:endParaRPr lang="en-US" sz="1688" dirty="0"/>
-          </a:p>
-        </p:txBody>
-      </p:sp>
-      <p:sp>
-        <p:nvSpPr>
-          <p:cNvPr id="29" name="Прямоугольник 28"/>
-          <p:cNvSpPr/>
-          <p:nvPr/>
-        </p:nvSpPr>
-        <p:spPr>
-          <a:xfrm>
-            <a:off x="170598" y="959378"/>
-            <a:ext cx="8800000" cy="4500000"/>
-          </a:xfrm>
-          <a:prstGeom prst="rect">
-            <a:avLst/>
-          </a:prstGeom>
-        </p:spPr>
-        <p:txBody>
-          <a:bodyPr wrap="square">
-            <a:spAutoFit/>
-          </a:bodyPr>
-          <a:lstStyle/>
-          <a:p>
-            <a:r>
-              <a:rPr lang="ru-RU" sz="1400" b="1" dirty="0"/>
-              <a:t>Маркетинг</a:t>
-            </a:r>
-          </a:p>
-          <a:p>
-            <a:endParaRPr lang="ru-RU" sz="1100" dirty="0"/>
-          </a:p>
-          <a:p>
-            <a:r>
-              <a:rPr lang="ru-RU" sz="1100" b="1" dirty="0"/>
-              <a:t>1. Каталог и инструменты</a:t>
-            </a:r>
-          </a:p>
-          <a:p>
-            <a:r>
-              <a:rPr lang="ru-RU" sz="1100" b="1" dirty="0"/>
-              <a:t>Обновление печатного каталога</a:t>
-            </a:r>
-            <a:r>
-              <a:rPr lang="ru-RU" sz="1100" dirty="0"/>
-              <a:t> – портфолио продуктов, подход от клиента. Каталог закрывает потребности клиента, это точка отсчёта для формирования технологических карт сочетаний продуктов для максимального эффекта.</a:t>
-            </a:r>
-          </a:p>
-          <a:p>
-            <a:r>
-              <a:rPr lang="ru-RU" sz="1100" b="1" dirty="0"/>
-              <a:t>TCO калькулятор</a:t>
-            </a:r>
-            <a:r>
-              <a:rPr lang="ru-RU" sz="1100" dirty="0"/>
-              <a:t> на базе Excel.</a:t>
-            </a:r>
-          </a:p>
-          <a:p>
-            <a:endParaRPr lang="ru-RU" sz="1100" dirty="0"/>
-          </a:p>
-          <a:p>
-            <a:r>
-              <a:rPr lang="ru-RU" sz="1100" b="1" dirty="0"/>
-              <a:t>2. Диджитал и коммуникации</a:t>
-            </a:r>
-          </a:p>
-          <a:p>
-            <a:r>
-              <a:rPr lang="ru-RU" sz="1100" b="1" dirty="0"/>
-              <a:t>Добавить</a:t>
-            </a:r>
-            <a:r>
-              <a:rPr lang="ru-RU" sz="1100" dirty="0"/>
-              <a:t> информацию о сгруппированных технологиях в каталог, на сайт, начать размещать профильные посты в соцсетях.</a:t>
-            </a:r>
-          </a:p>
-          <a:p>
-            <a:r>
-              <a:rPr lang="ru-RU" sz="1100" b="1" dirty="0"/>
-              <a:t>Рассылка</a:t>
-            </a:r>
-            <a:r>
-              <a:rPr lang="ru-RU" sz="1100" dirty="0"/>
-              <a:t> по партнёрам «Присоединяйтесь к нам в социальных сетях».</a:t>
-            </a:r>
-          </a:p>
-          <a:p>
-            <a:r>
-              <a:rPr lang="ru-RU" sz="1100" b="1" dirty="0"/>
-              <a:t>Запуск</a:t>
-            </a:r>
-            <a:r>
-              <a:rPr lang="ru-RU" sz="1100" dirty="0"/>
-              <a:t> Rutube канала.</a:t>
-            </a:r>
-          </a:p>
-          <a:p>
-            <a:r>
-              <a:rPr lang="ru-RU" sz="1100" b="1" dirty="0"/>
-              <a:t>Посадочная страница</a:t>
-            </a:r>
-            <a:r>
-              <a:rPr lang="ru-RU" sz="1100" dirty="0"/>
-              <a:t> «Стань партнёром Эмпилс» (rus, eng).</a:t>
-            </a:r>
-          </a:p>
-          <a:p>
-            <a:r>
-              <a:rPr lang="ru-RU" sz="1100" b="1" dirty="0"/>
-              <a:t>3DТур</a:t>
-            </a:r>
-            <a:r>
-              <a:rPr lang="ru-RU" sz="1100" dirty="0"/>
-              <a:t> по заводу — реализация в Яндекс/Google.</a:t>
-            </a:r>
-          </a:p>
-          <a:p>
-            <a:endParaRPr lang="ru-RU" sz="1100" dirty="0"/>
-          </a:p>
-          <a:p>
-            <a:r>
-              <a:rPr lang="ru-RU" sz="1100" b="1" dirty="0"/>
-              <a:t>3. Обучение и стандарты</a:t>
-            </a:r>
-          </a:p>
-          <a:p>
-            <a:r>
-              <a:rPr lang="ru-RU" sz="1100" b="1" dirty="0"/>
-              <a:t>Подготовка</a:t>
-            </a:r>
-            <a:r>
-              <a:rPr lang="ru-RU" sz="1100" dirty="0"/>
-              <a:t> трёх видов визуальных пригласительных для рассылки по партнёрам.</a:t>
-            </a:r>
-          </a:p>
-          <a:p>
-            <a:r>
-              <a:rPr lang="ru-RU" sz="1100" b="1" dirty="0"/>
-              <a:t>Отдельная презентация</a:t>
-            </a:r>
-            <a:r>
-              <a:rPr lang="ru-RU" sz="1100" dirty="0"/>
-              <a:t> по сгруппированным технологиям для рассылки дилерам.</a:t>
-            </a:r>
-          </a:p>
-          <a:p>
-            <a:r>
-              <a:rPr lang="ru-RU" sz="1100" b="1" dirty="0"/>
-              <a:t>Создать курс</a:t>
-            </a:r>
-            <a:r>
-              <a:rPr lang="ru-RU" sz="1100" dirty="0"/>
-              <a:t> по обучению презентации и продажи сгруппированных технологий.</a:t>
-            </a:r>
-          </a:p>
-          <a:p>
-            <a:r>
-              <a:rPr lang="ru-RU" sz="1100" b="1" dirty="0"/>
-              <a:t>Стандартизация</a:t>
-            </a:r>
-            <a:r>
-              <a:rPr lang="ru-RU" sz="1100" dirty="0"/>
-              <a:t> умений для полевой демонстрации ЛКМ Эмпилс.</a:t>
-            </a:r>
-          </a:p>
-        </p:txBody>
-      </p:sp>
-    </p:spTree>
-  </p:cSld>
-  <p:clrMapOvr>
-    <a:masterClrMapping/>
-  </p:clrMapOvr>
-</p:sld>
-</file>
-
-<file path=ppt/slides/slide15.xml><?xml version="1.0" encoding="utf-8"?>
-<p:sld xmlns:a="http://schemas.openxmlformats.org/drawingml/2006/main" xmlns:p="http://schemas.openxmlformats.org/presentationml/2006/main" xmlns:r="http://schemas.openxmlformats.org/officeDocument/2006/relationships">
-  <p:cSld>
-    <p:bg>
-      <p:bgPr>
-        <a:solidFill>
-          <a:srgbClr val="FFFFFF"/>
-        </a:solidFill>
-        <a:effectLst/>
-      </p:bgPr>
-    </p:bg>
-    <p:spTree>
-      <p:nvGrpSpPr>
-        <p:cNvPr id="1" name=""/>
-        <p:cNvGrpSpPr/>
-        <p:nvPr/>
-      </p:nvGrpSpPr>
-      <p:grpSpPr/>
-      <p:sp>
-        <p:nvSpPr>
           <p:cNvPr id="2" name="Rounded Rectangle 1"/>
           <p:cNvSpPr/>
           <p:nvPr/>
         </p:nvSpPr>
         <p:spPr>
           <a:xfrm>
-            <a:off x="457200" y="457200"/>
-            <a:ext cx="342900" cy="28575"/>
+            <a:off x="342900" y="228600"/>
+            <a:ext cx="457200" cy="38100"/>
           </a:xfrm>
           <a:prstGeom prst="roundRect">
             <a:avLst/>
@@ -10073,8 +9778,8 @@
         </p:nvSpPr>
         <p:spPr>
           <a:xfrm>
-            <a:off x="885825" y="400050"/>
-            <a:ext cx="7800975" cy="156754"/>
+            <a:off x="914400" y="171450"/>
+            <a:ext cx="5000000" cy="228600"/>
           </a:xfrm>
           <a:prstGeom prst="rect">
             <a:avLst/>
@@ -10088,9 +9793,9 @@
           <a:lstStyle/>
           <a:p>
             <a:r>
-              <a:rPr sz="800">
-                <a:solidFill>
-                  <a:srgbClr val="00B4D8"/>
+              <a:rPr sz="900" b="1">
+                <a:solidFill>
+                  <a:srgbClr val="90E0EF"/>
                 </a:solidFill>
                 <a:latin typeface="Carlito"/>
               </a:rPr>
@@ -10107,8 +9812,8 @@
         </p:nvSpPr>
         <p:spPr>
           <a:xfrm>
-            <a:off x="457200" y="700000"/>
-            <a:ext cx="8600000" cy="700000"/>
+            <a:off x="342900" y="400050"/>
+            <a:ext cx="8458200" cy="457200"/>
           </a:xfrm>
           <a:prstGeom prst="rect">
             <a:avLst/>
@@ -10122,176 +9827,42 @@
           <a:lstStyle/>
           <a:p>
             <a:r>
-              <a:rPr sz="1700" b="1">
-                <a:solidFill>
-                  <a:srgbClr val="0A2540"/>
+              <a:rPr sz="2000" b="1">
+                <a:solidFill>
+                  <a:srgbClr val="FFFFFF"/>
                 </a:solidFill>
                 <a:latin typeface="Carlito"/>
               </a:rPr>
-              <a:t>Что делать прямо сейчас: Продажи</a:t>
-            </a:r>
-          </a:p>
-        </p:txBody>
-      </p:sp>
-      <p:sp>
-        <p:nvSpPr>
-          <p:cNvPr id="5" name="TextBox 4"/>
-          <p:cNvSpPr txBox="1"/>
-          <p:nvPr/>
-        </p:nvSpPr>
-        <p:spPr>
-          <a:xfrm>
-            <a:off x="170598" y="959378"/>
-            <a:ext cx="8800000" cy="4500000"/>
-          </a:xfrm>
-          <a:prstGeom prst="rect">
-            <a:avLst/>
-          </a:prstGeom>
-          <a:noFill/>
-        </p:spPr>
-        <p:txBody>
-          <a:bodyPr wrap="square">
-            <a:spAutoFit/>
-          </a:bodyPr>
-          <a:lstStyle/>
-          <a:p>
-            <a:r>
-              <a:rPr sz="1400" b="1">
+              <a:t>Что делать прямо сейчас</a:t>
+            </a:r>
+            <a:r>
+              <a:rPr sz="1400" b="0">
+                <a:solidFill>
+                  <a:srgbClr val="90E0EF"/>
+                </a:solidFill>
                 <a:latin typeface="Carlito"/>
               </a:rPr>
-              <a:t>Продажи</a:t>
-            </a:r>
-          </a:p>
-          <a:p>
-            <a:r>
-              <a:rPr sz="1100"/>
-              <a:t/>
-            </a:r>
-          </a:p>
-          <a:p>
-            <a:r>
-              <a:rPr sz="1100" b="1">
-                <a:latin typeface="Carlito"/>
-              </a:rPr>
-              <a:t>1. Работа с базой (CRM)</a:t>
-            </a:r>
-          </a:p>
-          <a:p>
-            <a:r>
-              <a:rPr sz="1100" b="1">
-                <a:latin typeface="Carlito"/>
-              </a:rPr>
-              <a:t>Создание</a:t>
-            </a:r>
-            <a:r>
-              <a:rPr sz="1100" b="0">
-                <a:latin typeface="Carlito"/>
-              </a:rPr>
-              <a:t> базы потенциальных партнёров, потерянных партнёров, тех, кто не хочет с нами работать.</a:t>
-            </a:r>
-          </a:p>
-          <a:p>
-            <a:r>
-              <a:rPr sz="1100"/>
-              <a:t/>
-            </a:r>
-          </a:p>
-          <a:p>
-            <a:r>
-              <a:rPr sz="1100" b="1">
-                <a:latin typeface="Carlito"/>
-              </a:rPr>
-              <a:t>2. Коммуникация с рынком</a:t>
-            </a:r>
-          </a:p>
-          <a:p>
-            <a:r>
-              <a:rPr sz="1100" b="1">
-                <a:latin typeface="Carlito"/>
-              </a:rPr>
-              <a:t>Рассылка</a:t>
-            </a:r>
-            <a:r>
-              <a:rPr sz="1100" b="0">
-                <a:latin typeface="Carlito"/>
-              </a:rPr>
-              <a:t> по потенциальным партнёрам визуального пригласительного письма познакомиться с компанией Эмпилс.</a:t>
-            </a:r>
-          </a:p>
-          <a:p>
-            <a:r>
-              <a:rPr sz="1100" b="1">
-                <a:latin typeface="Carlito"/>
-              </a:rPr>
-              <a:t>Посыл:</a:t>
-            </a:r>
-            <a:r>
-              <a:rPr sz="1100" b="0">
-                <a:latin typeface="Carlito"/>
-              </a:rPr>
-              <a:t> завод обновился не только в физическом плане — капитальный ремонт, но и обновился в своих подходах к ведению бизнеса.</a:t>
-            </a:r>
-          </a:p>
-          <a:p>
-            <a:r>
-              <a:rPr sz="1100"/>
-              <a:t/>
-            </a:r>
-          </a:p>
-          <a:p>
-            <a:r>
-              <a:rPr sz="1100" b="1">
-                <a:latin typeface="Carlito"/>
-              </a:rPr>
-              <a:t>3. Полевая работа</a:t>
-            </a:r>
-          </a:p>
-          <a:p>
-            <a:r>
-              <a:rPr sz="1100" b="1">
-                <a:latin typeface="Carlito"/>
-              </a:rPr>
-              <a:t>Обучение</a:t>
-            </a:r>
-            <a:r>
-              <a:rPr sz="1100" b="0">
-                <a:latin typeface="Carlito"/>
-              </a:rPr>
-              <a:t> региональной команды по новому формату полевой демонстрации продукции.</a:t>
-            </a:r>
-          </a:p>
-          <a:p>
-            <a:r>
-              <a:rPr sz="1100" b="1">
-                <a:latin typeface="Carlito"/>
-              </a:rPr>
-              <a:t>План-график</a:t>
-            </a:r>
-            <a:r>
-              <a:rPr sz="1100" b="0">
-                <a:latin typeface="Carlito"/>
-              </a:rPr>
-              <a:t> мероприятий встреч, полевая лаборатория у партнёров. Систематическая работа.</a:t>
-            </a:r>
-          </a:p>
-        </p:txBody>
-      </p:sp>
-      <p:sp>
-        <p:nvSpPr>
-          <p:cNvPr id="6" name="Rectangle 5"/>
-          <p:cNvSpPr/>
-          <p:nvPr/>
-        </p:nvSpPr>
-        <p:spPr>
-          <a:xfrm>
-            <a:off x="457200" y="4700000"/>
-            <a:ext cx="8250000" cy="1143"/>
+              <a:t>  ·  начать с малого</a:t>
+            </a:r>
+          </a:p>
+        </p:txBody>
+      </p:sp>
+      <p:sp>
+        <p:nvSpPr>
+          <p:cNvPr id="5" name="Rectangle 4"/>
+          <p:cNvSpPr/>
+          <p:nvPr/>
+        </p:nvSpPr>
+        <p:spPr>
+          <a:xfrm>
+            <a:off x="342900" y="838200"/>
+            <a:ext cx="8458200" cy="5715"/>
           </a:xfrm>
           <a:prstGeom prst="rect">
             <a:avLst/>
           </a:prstGeom>
           <a:solidFill>
-            <a:srgbClr val="F0F7FA"/>
+            <a:srgbClr val="00B4D8"/>
           </a:solidFill>
           <a:ln>
             <a:noFill/>
@@ -10321,23 +9892,25 @@
       </p:sp>
       <p:sp>
         <p:nvSpPr>
-          <p:cNvPr id="7" name="Rounded Rectangle 6"/>
-          <p:cNvSpPr/>
-          <p:nvPr/>
-        </p:nvSpPr>
-        <p:spPr>
-          <a:xfrm>
-            <a:off x="457200" y="4800000"/>
-            <a:ext cx="342900" cy="28575"/>
+          <p:cNvPr id="6" name="Rounded Rectangle 5"/>
+          <p:cNvSpPr/>
+          <p:nvPr/>
+        </p:nvSpPr>
+        <p:spPr>
+          <a:xfrm>
+            <a:off x="228600" y="914400"/>
+            <a:ext cx="4343400" cy="3810000"/>
           </a:xfrm>
           <a:prstGeom prst="roundRect">
             <a:avLst/>
           </a:prstGeom>
           <a:solidFill>
-            <a:srgbClr val="00B4D8"/>
+            <a:srgbClr val="102A45"/>
           </a:solidFill>
-          <a:ln>
-            <a:noFill/>
+          <a:ln w="6350">
+            <a:solidFill>
+              <a:srgbClr val="1A3D5C"/>
+            </a:solidFill>
           </a:ln>
         </p:spPr>
         <p:style>
@@ -10364,14 +9937,855 @@
       </p:sp>
       <p:sp>
         <p:nvSpPr>
+          <p:cNvPr id="7" name="Rectangle 6"/>
+          <p:cNvSpPr/>
+          <p:nvPr/>
+        </p:nvSpPr>
+        <p:spPr>
+          <a:xfrm>
+            <a:off x="228600" y="1028700"/>
+            <a:ext cx="57150" cy="3581400"/>
+          </a:xfrm>
+          <a:prstGeom prst="rect">
+            <a:avLst/>
+          </a:prstGeom>
+          <a:solidFill>
+            <a:srgbClr val="00B4D8"/>
+          </a:solidFill>
+          <a:ln>
+            <a:noFill/>
+          </a:ln>
+        </p:spPr>
+        <p:style>
+          <a:lnRef idx="1">
+            <a:schemeClr val="accent1"/>
+          </a:lnRef>
+          <a:fillRef idx="3">
+            <a:schemeClr val="accent1"/>
+          </a:fillRef>
+          <a:effectRef idx="2">
+            <a:schemeClr val="accent1"/>
+          </a:effectRef>
+          <a:fontRef idx="minor">
+            <a:schemeClr val="lt1"/>
+          </a:fontRef>
+        </p:style>
+        <p:txBody>
+          <a:bodyPr rtlCol="0" anchor="ctr"/>
+          <a:lstStyle/>
+          <a:p>
+            <a:pPr algn="ctr"/>
+          </a:p>
+        </p:txBody>
+      </p:sp>
+      <p:sp>
+        <p:nvSpPr>
           <p:cNvPr id="8" name="TextBox 7"/>
           <p:cNvSpPr txBox="1"/>
           <p:nvPr/>
         </p:nvSpPr>
         <p:spPr>
           <a:xfrm>
-            <a:off x="885825" y="4700000"/>
-            <a:ext cx="7800975" cy="500000"/>
+            <a:off x="342900" y="971550"/>
+            <a:ext cx="4114800" cy="342900"/>
+          </a:xfrm>
+          <a:prstGeom prst="rect">
+            <a:avLst/>
+          </a:prstGeom>
+          <a:noFill/>
+        </p:spPr>
+        <p:txBody>
+          <a:bodyPr wrap="square">
+            <a:spAutoFit/>
+          </a:bodyPr>
+          <a:lstStyle/>
+          <a:p>
+            <a:r>
+              <a:rPr sz="1500" b="1">
+                <a:solidFill>
+                  <a:srgbClr val="00B4D8"/>
+                </a:solidFill>
+                <a:latin typeface="Carlito"/>
+              </a:rPr>
+              <a:t>◆  Маркетинг</a:t>
+            </a:r>
+          </a:p>
+        </p:txBody>
+      </p:sp>
+      <p:sp>
+        <p:nvSpPr>
+          <p:cNvPr id="9" name="TextBox 8"/>
+          <p:cNvSpPr txBox="1"/>
+          <p:nvPr/>
+        </p:nvSpPr>
+        <p:spPr>
+          <a:xfrm>
+            <a:off x="400050" y="1314450"/>
+            <a:ext cx="4000500" cy="3352800"/>
+          </a:xfrm>
+          <a:prstGeom prst="rect">
+            <a:avLst/>
+          </a:prstGeom>
+          <a:noFill/>
+        </p:spPr>
+        <p:txBody>
+          <a:bodyPr wrap="square">
+            <a:spAutoFit/>
+          </a:bodyPr>
+          <a:lstStyle/>
+          <a:p>
+            <a:r>
+              <a:rPr sz="900" b="1">
+                <a:solidFill>
+                  <a:srgbClr val="48CAE4"/>
+                </a:solidFill>
+                <a:latin typeface="Carlito"/>
+              </a:rPr>
+              <a:t>▸ Каталог и инструменты</a:t>
+            </a:r>
+          </a:p>
+          <a:p>
+            <a:r>
+              <a:rPr sz="700">
+                <a:solidFill>
+                  <a:srgbClr val="00B4D8"/>
+                </a:solidFill>
+                <a:latin typeface="Carlito"/>
+              </a:rPr>
+              <a:t>● </a:t>
+            </a:r>
+            <a:r>
+              <a:rPr sz="750">
+                <a:solidFill>
+                  <a:srgbClr val="D0E8F0"/>
+                </a:solidFill>
+                <a:latin typeface="Carlito"/>
+              </a:rPr>
+              <a:t>Обновление печатного каталога – портфолио продуктов, подход от клиента. Каталог закрывает потребности клиента, точка отсчёта для технологических карт.</a:t>
+            </a:r>
+          </a:p>
+          <a:p>
+            <a:r>
+              <a:rPr sz="700">
+                <a:solidFill>
+                  <a:srgbClr val="00B4D8"/>
+                </a:solidFill>
+                <a:latin typeface="Carlito"/>
+              </a:rPr>
+              <a:t>● </a:t>
+            </a:r>
+            <a:r>
+              <a:rPr sz="750">
+                <a:solidFill>
+                  <a:srgbClr val="D0E8F0"/>
+                </a:solidFill>
+                <a:latin typeface="Carlito"/>
+              </a:rPr>
+              <a:t>TCO калькулятор на базе Excel.</a:t>
+            </a:r>
+          </a:p>
+          <a:p>
+            <a:pPr>
+              <a:spcBef>
+                <a:spcPts val="400"/>
+              </a:spcBef>
+            </a:pPr>
+            <a:r>
+              <a:rPr sz="900" b="1">
+                <a:solidFill>
+                  <a:srgbClr val="FCBF49"/>
+                </a:solidFill>
+                <a:latin typeface="Carlito"/>
+              </a:rPr>
+              <a:t>▸ Диджитал и коммуникации</a:t>
+            </a:r>
+          </a:p>
+          <a:p>
+            <a:r>
+              <a:rPr sz="700">
+                <a:solidFill>
+                  <a:srgbClr val="FCBF49"/>
+                </a:solidFill>
+                <a:latin typeface="Carlito"/>
+              </a:rPr>
+              <a:t>● </a:t>
+            </a:r>
+            <a:r>
+              <a:rPr sz="750">
+                <a:solidFill>
+                  <a:srgbClr val="D0E8F0"/>
+                </a:solidFill>
+                <a:latin typeface="Carlito"/>
+              </a:rPr>
+              <a:t>Добавить информацию о сгруппированных технологиях в каталог, на сайт, профильные посты в соцсетях.</a:t>
+            </a:r>
+          </a:p>
+          <a:p>
+            <a:r>
+              <a:rPr sz="700">
+                <a:solidFill>
+                  <a:srgbClr val="FCBF49"/>
+                </a:solidFill>
+                <a:latin typeface="Carlito"/>
+              </a:rPr>
+              <a:t>● </a:t>
+            </a:r>
+            <a:r>
+              <a:rPr sz="750">
+                <a:solidFill>
+                  <a:srgbClr val="D0E8F0"/>
+                </a:solidFill>
+                <a:latin typeface="Carlito"/>
+              </a:rPr>
+              <a:t>Рассылка по партнёрам «Присоединяйтесь к нам в социальных сетях».</a:t>
+            </a:r>
+          </a:p>
+          <a:p>
+            <a:r>
+              <a:rPr sz="700">
+                <a:solidFill>
+                  <a:srgbClr val="FCBF49"/>
+                </a:solidFill>
+                <a:latin typeface="Carlito"/>
+              </a:rPr>
+              <a:t>● </a:t>
+            </a:r>
+            <a:r>
+              <a:rPr sz="750">
+                <a:solidFill>
+                  <a:srgbClr val="D0E8F0"/>
+                </a:solidFill>
+                <a:latin typeface="Carlito"/>
+              </a:rPr>
+              <a:t>Запуск Rutube канала.</a:t>
+            </a:r>
+          </a:p>
+          <a:p>
+            <a:r>
+              <a:rPr sz="700">
+                <a:solidFill>
+                  <a:srgbClr val="FCBF49"/>
+                </a:solidFill>
+                <a:latin typeface="Carlito"/>
+              </a:rPr>
+              <a:t>● </a:t>
+            </a:r>
+            <a:r>
+              <a:rPr sz="750">
+                <a:solidFill>
+                  <a:srgbClr val="D0E8F0"/>
+                </a:solidFill>
+                <a:latin typeface="Carlito"/>
+              </a:rPr>
+              <a:t>Посадочная страница «Стань партнёром Эмпилс» (rus, eng).</a:t>
+            </a:r>
+          </a:p>
+          <a:p>
+            <a:r>
+              <a:rPr sz="700">
+                <a:solidFill>
+                  <a:srgbClr val="FCBF49"/>
+                </a:solidFill>
+                <a:latin typeface="Carlito"/>
+              </a:rPr>
+              <a:t>● </a:t>
+            </a:r>
+            <a:r>
+              <a:rPr sz="750">
+                <a:solidFill>
+                  <a:srgbClr val="D0E8F0"/>
+                </a:solidFill>
+                <a:latin typeface="Carlito"/>
+              </a:rPr>
+              <a:t>3DТур по заводу — реализация в Яндекс/Google.</a:t>
+            </a:r>
+          </a:p>
+          <a:p>
+            <a:pPr>
+              <a:spcBef>
+                <a:spcPts val="400"/>
+              </a:spcBef>
+            </a:pPr>
+            <a:r>
+              <a:rPr sz="900" b="1">
+                <a:solidFill>
+                  <a:srgbClr val="A86CFF"/>
+                </a:solidFill>
+                <a:latin typeface="Carlito"/>
+              </a:rPr>
+              <a:t>▸ Обучение и стандарты</a:t>
+            </a:r>
+          </a:p>
+          <a:p>
+            <a:r>
+              <a:rPr sz="700">
+                <a:solidFill>
+                  <a:srgbClr val="A86CFF"/>
+                </a:solidFill>
+                <a:latin typeface="Carlito"/>
+              </a:rPr>
+              <a:t>● </a:t>
+            </a:r>
+            <a:r>
+              <a:rPr sz="750">
+                <a:solidFill>
+                  <a:srgbClr val="D0E8F0"/>
+                </a:solidFill>
+                <a:latin typeface="Carlito"/>
+              </a:rPr>
+              <a:t>Подготовка трёх видов визуальных пригласительных для рассылки по партнёрам.</a:t>
+            </a:r>
+          </a:p>
+          <a:p>
+            <a:r>
+              <a:rPr sz="700">
+                <a:solidFill>
+                  <a:srgbClr val="A86CFF"/>
+                </a:solidFill>
+                <a:latin typeface="Carlito"/>
+              </a:rPr>
+              <a:t>● </a:t>
+            </a:r>
+            <a:r>
+              <a:rPr sz="750">
+                <a:solidFill>
+                  <a:srgbClr val="D0E8F0"/>
+                </a:solidFill>
+                <a:latin typeface="Carlito"/>
+              </a:rPr>
+              <a:t>Отдельная презентация по сгруппированным технологиям для рассылки дилерам.</a:t>
+            </a:r>
+          </a:p>
+          <a:p>
+            <a:r>
+              <a:rPr sz="700">
+                <a:solidFill>
+                  <a:srgbClr val="A86CFF"/>
+                </a:solidFill>
+                <a:latin typeface="Carlito"/>
+              </a:rPr>
+              <a:t>● </a:t>
+            </a:r>
+            <a:r>
+              <a:rPr sz="750">
+                <a:solidFill>
+                  <a:srgbClr val="D0E8F0"/>
+                </a:solidFill>
+                <a:latin typeface="Carlito"/>
+              </a:rPr>
+              <a:t>Создать курс по обучению презентации и продажи сгруппированных технологий.</a:t>
+            </a:r>
+          </a:p>
+          <a:p>
+            <a:r>
+              <a:rPr sz="700">
+                <a:solidFill>
+                  <a:srgbClr val="A86CFF"/>
+                </a:solidFill>
+                <a:latin typeface="Carlito"/>
+              </a:rPr>
+              <a:t>● </a:t>
+            </a:r>
+            <a:r>
+              <a:rPr sz="750">
+                <a:solidFill>
+                  <a:srgbClr val="D0E8F0"/>
+                </a:solidFill>
+                <a:latin typeface="Carlito"/>
+              </a:rPr>
+              <a:t>Стандартизация умений для полевой демонстрации ЛКМ Эмпилс.</a:t>
+            </a:r>
+          </a:p>
+        </p:txBody>
+      </p:sp>
+      <p:sp>
+        <p:nvSpPr>
+          <p:cNvPr id="10" name="Rounded Rectangle 9"/>
+          <p:cNvSpPr/>
+          <p:nvPr/>
+        </p:nvSpPr>
+        <p:spPr>
+          <a:xfrm>
+            <a:off x="4799980" y="914400"/>
+            <a:ext cx="4114800" cy="3810000"/>
+          </a:xfrm>
+          <a:prstGeom prst="roundRect">
+            <a:avLst/>
+          </a:prstGeom>
+          <a:solidFill>
+            <a:srgbClr val="1A2035"/>
+          </a:solidFill>
+          <a:ln w="6350">
+            <a:solidFill>
+              <a:srgbClr val="2A1A40"/>
+            </a:solidFill>
+          </a:ln>
+        </p:spPr>
+        <p:style>
+          <a:lnRef idx="1">
+            <a:schemeClr val="accent1"/>
+          </a:lnRef>
+          <a:fillRef idx="3">
+            <a:schemeClr val="accent1"/>
+          </a:fillRef>
+          <a:effectRef idx="2">
+            <a:schemeClr val="accent1"/>
+          </a:effectRef>
+          <a:fontRef idx="minor">
+            <a:schemeClr val="lt1"/>
+          </a:fontRef>
+        </p:style>
+        <p:txBody>
+          <a:bodyPr rtlCol="0" anchor="ctr"/>
+          <a:lstStyle/>
+          <a:p>
+            <a:pPr algn="ctr"/>
+          </a:p>
+        </p:txBody>
+      </p:sp>
+      <p:sp>
+        <p:nvSpPr>
+          <p:cNvPr id="11" name="Rectangle 10"/>
+          <p:cNvSpPr/>
+          <p:nvPr/>
+        </p:nvSpPr>
+        <p:spPr>
+          <a:xfrm>
+            <a:off x="4799980" y="1028700"/>
+            <a:ext cx="57150" cy="3581400"/>
+          </a:xfrm>
+          <a:prstGeom prst="rect">
+            <a:avLst/>
+          </a:prstGeom>
+          <a:solidFill>
+            <a:srgbClr val="FF7F3F"/>
+          </a:solidFill>
+          <a:ln>
+            <a:noFill/>
+          </a:ln>
+        </p:spPr>
+        <p:style>
+          <a:lnRef idx="1">
+            <a:schemeClr val="accent1"/>
+          </a:lnRef>
+          <a:fillRef idx="3">
+            <a:schemeClr val="accent1"/>
+          </a:fillRef>
+          <a:effectRef idx="2">
+            <a:schemeClr val="accent1"/>
+          </a:effectRef>
+          <a:fontRef idx="minor">
+            <a:schemeClr val="lt1"/>
+          </a:fontRef>
+        </p:style>
+        <p:txBody>
+          <a:bodyPr rtlCol="0" anchor="ctr"/>
+          <a:lstStyle/>
+          <a:p>
+            <a:pPr algn="ctr"/>
+          </a:p>
+        </p:txBody>
+      </p:sp>
+      <p:sp>
+        <p:nvSpPr>
+          <p:cNvPr id="12" name="TextBox 11"/>
+          <p:cNvSpPr txBox="1"/>
+          <p:nvPr/>
+        </p:nvSpPr>
+        <p:spPr>
+          <a:xfrm>
+            <a:off x="4914280" y="971550"/>
+            <a:ext cx="3886200" cy="342900"/>
+          </a:xfrm>
+          <a:prstGeom prst="rect">
+            <a:avLst/>
+          </a:prstGeom>
+          <a:noFill/>
+        </p:spPr>
+        <p:txBody>
+          <a:bodyPr wrap="square">
+            <a:spAutoFit/>
+          </a:bodyPr>
+          <a:lstStyle/>
+          <a:p>
+            <a:r>
+              <a:rPr sz="1500" b="1">
+                <a:solidFill>
+                  <a:srgbClr val="FF7F3F"/>
+                </a:solidFill>
+                <a:latin typeface="Carlito"/>
+              </a:rPr>
+              <a:t>◆  Продажи</a:t>
+            </a:r>
+          </a:p>
+        </p:txBody>
+      </p:sp>
+      <p:sp>
+        <p:nvSpPr>
+          <p:cNvPr id="13" name="TextBox 12"/>
+          <p:cNvSpPr txBox="1"/>
+          <p:nvPr/>
+        </p:nvSpPr>
+        <p:spPr>
+          <a:xfrm>
+            <a:off x="4971430" y="1314450"/>
+            <a:ext cx="3771900" cy="3352800"/>
+          </a:xfrm>
+          <a:prstGeom prst="rect">
+            <a:avLst/>
+          </a:prstGeom>
+          <a:noFill/>
+        </p:spPr>
+        <p:txBody>
+          <a:bodyPr wrap="square">
+            <a:spAutoFit/>
+          </a:bodyPr>
+          <a:lstStyle/>
+          <a:p>
+            <a:r>
+              <a:rPr sz="900" b="1">
+                <a:solidFill>
+                  <a:srgbClr val="FF7F3F"/>
+                </a:solidFill>
+                <a:latin typeface="Carlito"/>
+              </a:rPr>
+              <a:t>▸ Работа с базой (CRM)</a:t>
+            </a:r>
+          </a:p>
+          <a:p>
+            <a:r>
+              <a:rPr sz="700">
+                <a:solidFill>
+                  <a:srgbClr val="FF7F3F"/>
+                </a:solidFill>
+                <a:latin typeface="Carlito"/>
+              </a:rPr>
+              <a:t>● </a:t>
+            </a:r>
+            <a:r>
+              <a:rPr sz="750">
+                <a:solidFill>
+                  <a:srgbClr val="E8DDD0"/>
+                </a:solidFill>
+                <a:latin typeface="Carlito"/>
+              </a:rPr>
+              <a:t>Создание базы потенциальных партнёров, потерянных партнёров, тех, кто не хочет с нами работать.</a:t>
+            </a:r>
+          </a:p>
+          <a:p>
+            <a:pPr>
+              <a:spcBef>
+                <a:spcPts val="400"/>
+              </a:spcBef>
+            </a:pPr>
+            <a:r>
+              <a:rPr sz="900" b="1">
+                <a:solidFill>
+                  <a:srgbClr val="FF6B6B"/>
+                </a:solidFill>
+                <a:latin typeface="Carlito"/>
+              </a:rPr>
+              <a:t>▸ Коммуникация с рынком</a:t>
+            </a:r>
+          </a:p>
+          <a:p>
+            <a:r>
+              <a:rPr sz="700">
+                <a:solidFill>
+                  <a:srgbClr val="FF6B6B"/>
+                </a:solidFill>
+                <a:latin typeface="Carlito"/>
+              </a:rPr>
+              <a:t>● </a:t>
+            </a:r>
+            <a:r>
+              <a:rPr sz="750">
+                <a:solidFill>
+                  <a:srgbClr val="E8DDD0"/>
+                </a:solidFill>
+                <a:latin typeface="Carlito"/>
+              </a:rPr>
+              <a:t>Рассылка по потенциальным партнёрам визуального пригласительного письма познакомиться с компанией Эмпилс.</a:t>
+            </a:r>
+          </a:p>
+          <a:p>
+            <a:r>
+              <a:rPr sz="700">
+                <a:solidFill>
+                  <a:srgbClr val="FF6B6B"/>
+                </a:solidFill>
+                <a:latin typeface="Carlito"/>
+              </a:rPr>
+              <a:t>● </a:t>
+            </a:r>
+            <a:r>
+              <a:rPr sz="750">
+                <a:solidFill>
+                  <a:srgbClr val="E8DDD0"/>
+                </a:solidFill>
+                <a:latin typeface="Carlito"/>
+              </a:rPr>
+              <a:t>Посыл: завод обновился не только в физическом плане — капитальный ремонт, но и обновился в своих подходах к ведению бизнеса.</a:t>
+            </a:r>
+          </a:p>
+          <a:p>
+            <a:pPr>
+              <a:spcBef>
+                <a:spcPts val="400"/>
+              </a:spcBef>
+            </a:pPr>
+            <a:r>
+              <a:rPr sz="900" b="1">
+                <a:solidFill>
+                  <a:srgbClr val="2ECC71"/>
+                </a:solidFill>
+                <a:latin typeface="Carlito"/>
+              </a:rPr>
+              <a:t>▸ Полевая работа</a:t>
+            </a:r>
+          </a:p>
+          <a:p>
+            <a:r>
+              <a:rPr sz="700">
+                <a:solidFill>
+                  <a:srgbClr val="2ECC71"/>
+                </a:solidFill>
+                <a:latin typeface="Carlito"/>
+              </a:rPr>
+              <a:t>● </a:t>
+            </a:r>
+            <a:r>
+              <a:rPr sz="750">
+                <a:solidFill>
+                  <a:srgbClr val="E8DDD0"/>
+                </a:solidFill>
+                <a:latin typeface="Carlito"/>
+              </a:rPr>
+              <a:t>Обучение региональной команды по новому формату полевой демонстрации продукции.</a:t>
+            </a:r>
+          </a:p>
+          <a:p>
+            <a:r>
+              <a:rPr sz="700">
+                <a:solidFill>
+                  <a:srgbClr val="2ECC71"/>
+                </a:solidFill>
+                <a:latin typeface="Carlito"/>
+              </a:rPr>
+              <a:t>● </a:t>
+            </a:r>
+            <a:r>
+              <a:rPr sz="750">
+                <a:solidFill>
+                  <a:srgbClr val="E8DDD0"/>
+                </a:solidFill>
+                <a:latin typeface="Carlito"/>
+              </a:rPr>
+              <a:t>План-график мероприятий встреч, полевая лаборатория у партнёров. Систематическая работа.</a:t>
+            </a:r>
+          </a:p>
+        </p:txBody>
+      </p:sp>
+      <p:sp>
+        <p:nvSpPr>
+          <p:cNvPr id="14" name="Rounded Rectangle 13"/>
+          <p:cNvSpPr/>
+          <p:nvPr/>
+        </p:nvSpPr>
+        <p:spPr>
+          <a:xfrm>
+            <a:off x="3372000" y="994400"/>
+            <a:ext cx="1050000" cy="228600"/>
+          </a:xfrm>
+          <a:prstGeom prst="roundRect">
+            <a:avLst/>
+          </a:prstGeom>
+          <a:solidFill>
+            <a:srgbClr val="00B4D8"/>
+          </a:solidFill>
+          <a:ln>
+            <a:noFill/>
+          </a:ln>
+        </p:spPr>
+        <p:style>
+          <a:lnRef idx="1">
+            <a:schemeClr val="accent1"/>
+          </a:lnRef>
+          <a:fillRef idx="3">
+            <a:schemeClr val="accent1"/>
+          </a:fillRef>
+          <a:effectRef idx="2">
+            <a:schemeClr val="accent1"/>
+          </a:effectRef>
+          <a:fontRef idx="minor">
+            <a:schemeClr val="lt1"/>
+          </a:fontRef>
+        </p:style>
+        <p:txBody>
+          <a:bodyPr rtlCol="0" anchor="ctr" wrap="none"/>
+          <a:lstStyle/>
+          <a:p>
+            <a:pPr algn="ctr"/>
+            <a:r>
+              <a:rPr sz="900" b="1">
+                <a:solidFill>
+                  <a:srgbClr val="0A2540"/>
+                </a:solidFill>
+                <a:latin typeface="Carlito"/>
+              </a:rPr>
+              <a:t>11 задач</a:t>
+            </a:r>
+          </a:p>
+        </p:txBody>
+      </p:sp>
+      <p:sp>
+        <p:nvSpPr>
+          <p:cNvPr id="15" name="Rounded Rectangle 14"/>
+          <p:cNvSpPr/>
+          <p:nvPr/>
+        </p:nvSpPr>
+        <p:spPr>
+          <a:xfrm>
+            <a:off x="7814780" y="994400"/>
+            <a:ext cx="950000" cy="228600"/>
+          </a:xfrm>
+          <a:prstGeom prst="roundRect">
+            <a:avLst/>
+          </a:prstGeom>
+          <a:solidFill>
+            <a:srgbClr val="FF7F3F"/>
+          </a:solidFill>
+          <a:ln>
+            <a:noFill/>
+          </a:ln>
+        </p:spPr>
+        <p:style>
+          <a:lnRef idx="1">
+            <a:schemeClr val="accent1"/>
+          </a:lnRef>
+          <a:fillRef idx="3">
+            <a:schemeClr val="accent1"/>
+          </a:fillRef>
+          <a:effectRef idx="2">
+            <a:schemeClr val="accent1"/>
+          </a:effectRef>
+          <a:fontRef idx="minor">
+            <a:schemeClr val="lt1"/>
+          </a:fontRef>
+        </p:style>
+        <p:txBody>
+          <a:bodyPr rtlCol="0" anchor="ctr" wrap="none"/>
+          <a:lstStyle/>
+          <a:p>
+            <a:pPr algn="ctr"/>
+            <a:r>
+              <a:rPr sz="900" b="1">
+                <a:solidFill>
+                  <a:srgbClr val="0A2540"/>
+                </a:solidFill>
+                <a:latin typeface="Carlito"/>
+              </a:rPr>
+              <a:t>4 задачи</a:t>
+            </a:r>
+          </a:p>
+        </p:txBody>
+      </p:sp>
+      <p:sp>
+        <p:nvSpPr>
+          <p:cNvPr id="16" name="Rectangle 15"/>
+          <p:cNvSpPr/>
+          <p:nvPr/>
+        </p:nvSpPr>
+        <p:spPr>
+          <a:xfrm>
+            <a:off x="0" y="4876800"/>
+            <a:ext cx="9144000" cy="266700"/>
+          </a:xfrm>
+          <a:prstGeom prst="rect">
+            <a:avLst/>
+          </a:prstGeom>
+          <a:solidFill>
+            <a:srgbClr val="0A1A2E"/>
+          </a:solidFill>
+          <a:ln>
+            <a:noFill/>
+          </a:ln>
+        </p:spPr>
+        <p:style>
+          <a:lnRef idx="1">
+            <a:schemeClr val="accent1"/>
+          </a:lnRef>
+          <a:fillRef idx="3">
+            <a:schemeClr val="accent1"/>
+          </a:fillRef>
+          <a:effectRef idx="2">
+            <a:schemeClr val="accent1"/>
+          </a:effectRef>
+          <a:fontRef idx="minor">
+            <a:schemeClr val="lt1"/>
+          </a:fontRef>
+        </p:style>
+        <p:txBody>
+          <a:bodyPr rtlCol="0" anchor="ctr"/>
+          <a:lstStyle/>
+          <a:p>
+            <a:pPr algn="ctr"/>
+          </a:p>
+        </p:txBody>
+      </p:sp>
+      <p:sp>
+        <p:nvSpPr>
+          <p:cNvPr id="17" name="Rectangle 16"/>
+          <p:cNvSpPr/>
+          <p:nvPr/>
+        </p:nvSpPr>
+        <p:spPr>
+          <a:xfrm>
+            <a:off x="342900" y="4876800"/>
+            <a:ext cx="8458200" cy="19050"/>
+          </a:xfrm>
+          <a:prstGeom prst="rect">
+            <a:avLst/>
+          </a:prstGeom>
+          <a:solidFill>
+            <a:srgbClr val="00B4D8"/>
+          </a:solidFill>
+          <a:ln>
+            <a:noFill/>
+          </a:ln>
+        </p:spPr>
+        <p:style>
+          <a:lnRef idx="1">
+            <a:schemeClr val="accent1"/>
+          </a:lnRef>
+          <a:fillRef idx="3">
+            <a:schemeClr val="accent1"/>
+          </a:fillRef>
+          <a:effectRef idx="2">
+            <a:schemeClr val="accent1"/>
+          </a:effectRef>
+          <a:fontRef idx="minor">
+            <a:schemeClr val="lt1"/>
+          </a:fontRef>
+        </p:style>
+        <p:txBody>
+          <a:bodyPr rtlCol="0" anchor="ctr"/>
+          <a:lstStyle/>
+          <a:p>
+            <a:pPr algn="ctr"/>
+          </a:p>
+        </p:txBody>
+      </p:sp>
+      <p:sp>
+        <p:nvSpPr>
+          <p:cNvPr id="18" name="TextBox 17"/>
+          <p:cNvSpPr txBox="1"/>
+          <p:nvPr/>
+        </p:nvSpPr>
+        <p:spPr>
+          <a:xfrm>
+            <a:off x="342900" y="4905360"/>
+            <a:ext cx="8458200" cy="228600"/>
           </a:xfrm>
           <a:prstGeom prst="rect">
             <a:avLst/>
@@ -10385,14 +10799,281 @@
           <a:lstStyle/>
           <a:p>
             <a:r>
-              <a:rPr sz="1125" b="1">
+              <a:rPr sz="1100" b="1">
                 <a:solidFill>
                   <a:srgbClr val="00B4D8"/>
                 </a:solidFill>
                 <a:latin typeface="Carlito"/>
               </a:rPr>
-              <a:t>Эмпилс — от cheapest к chosen</a:t>
-            </a:r>
+              <a:t>Эмпилс</a:t>
+            </a:r>
+            <a:r>
+              <a:rPr sz="1000" b="0">
+                <a:solidFill>
+                  <a:srgbClr val="90E0EF"/>
+                </a:solidFill>
+                <a:latin typeface="Carlito"/>
+              </a:rPr>
+              <a:t>  —  от cheapest к chosen</a:t>
+            </a:r>
+          </a:p>
+        </p:txBody>
+      </p:sp>
+      <p:sp>
+        <p:nvSpPr>
+          <p:cNvPr id="19" name="Oval 18"/>
+          <p:cNvSpPr/>
+          <p:nvPr/>
+        </p:nvSpPr>
+        <p:spPr>
+          <a:xfrm>
+            <a:off x="8572500" y="171450"/>
+            <a:ext cx="57150" cy="57150"/>
+          </a:xfrm>
+          <a:prstGeom prst="ellipse">
+            <a:avLst/>
+          </a:prstGeom>
+          <a:solidFill>
+            <a:srgbClr val="00B4D8"/>
+          </a:solidFill>
+          <a:ln>
+            <a:noFill/>
+          </a:ln>
+        </p:spPr>
+        <p:style>
+          <a:lnRef idx="1">
+            <a:schemeClr val="accent1"/>
+          </a:lnRef>
+          <a:fillRef idx="3">
+            <a:schemeClr val="accent1"/>
+          </a:fillRef>
+          <a:effectRef idx="2">
+            <a:schemeClr val="accent1"/>
+          </a:effectRef>
+          <a:fontRef idx="minor">
+            <a:schemeClr val="lt1"/>
+          </a:fontRef>
+        </p:style>
+        <p:txBody>
+          <a:bodyPr rtlCol="0" anchor="ctr"/>
+          <a:lstStyle/>
+          <a:p>
+            <a:pPr algn="ctr"/>
+          </a:p>
+        </p:txBody>
+      </p:sp>
+      <p:sp>
+        <p:nvSpPr>
+          <p:cNvPr id="20" name="Oval 19"/>
+          <p:cNvSpPr/>
+          <p:nvPr/>
+        </p:nvSpPr>
+        <p:spPr>
+          <a:xfrm>
+            <a:off x="8667750" y="171450"/>
+            <a:ext cx="57150" cy="57150"/>
+          </a:xfrm>
+          <a:prstGeom prst="ellipse">
+            <a:avLst/>
+          </a:prstGeom>
+          <a:solidFill>
+            <a:srgbClr val="FCBF49"/>
+          </a:solidFill>
+          <a:ln>
+            <a:noFill/>
+          </a:ln>
+        </p:spPr>
+        <p:style>
+          <a:lnRef idx="1">
+            <a:schemeClr val="accent1"/>
+          </a:lnRef>
+          <a:fillRef idx="3">
+            <a:schemeClr val="accent1"/>
+          </a:fillRef>
+          <a:effectRef idx="2">
+            <a:schemeClr val="accent1"/>
+          </a:effectRef>
+          <a:fontRef idx="minor">
+            <a:schemeClr val="lt1"/>
+          </a:fontRef>
+        </p:style>
+        <p:txBody>
+          <a:bodyPr rtlCol="0" anchor="ctr"/>
+          <a:lstStyle/>
+          <a:p>
+            <a:pPr algn="ctr"/>
+          </a:p>
+        </p:txBody>
+      </p:sp>
+      <p:sp>
+        <p:nvSpPr>
+          <p:cNvPr id="21" name="Oval 20"/>
+          <p:cNvSpPr/>
+          <p:nvPr/>
+        </p:nvSpPr>
+        <p:spPr>
+          <a:xfrm>
+            <a:off x="8763000" y="171450"/>
+            <a:ext cx="57150" cy="57150"/>
+          </a:xfrm>
+          <a:prstGeom prst="ellipse">
+            <a:avLst/>
+          </a:prstGeom>
+          <a:solidFill>
+            <a:srgbClr val="FF7F3F"/>
+          </a:solidFill>
+          <a:ln>
+            <a:noFill/>
+          </a:ln>
+        </p:spPr>
+        <p:style>
+          <a:lnRef idx="1">
+            <a:schemeClr val="accent1"/>
+          </a:lnRef>
+          <a:fillRef idx="3">
+            <a:schemeClr val="accent1"/>
+          </a:fillRef>
+          <a:effectRef idx="2">
+            <a:schemeClr val="accent1"/>
+          </a:effectRef>
+          <a:fontRef idx="minor">
+            <a:schemeClr val="lt1"/>
+          </a:fontRef>
+        </p:style>
+        <p:txBody>
+          <a:bodyPr rtlCol="0" anchor="ctr"/>
+          <a:lstStyle/>
+          <a:p>
+            <a:pPr algn="ctr"/>
+          </a:p>
+        </p:txBody>
+      </p:sp>
+      <p:sp>
+        <p:nvSpPr>
+          <p:cNvPr id="22" name="Oval 21"/>
+          <p:cNvSpPr/>
+          <p:nvPr/>
+        </p:nvSpPr>
+        <p:spPr>
+          <a:xfrm>
+            <a:off x="8858250" y="171450"/>
+            <a:ext cx="57150" cy="57150"/>
+          </a:xfrm>
+          <a:prstGeom prst="ellipse">
+            <a:avLst/>
+          </a:prstGeom>
+          <a:solidFill>
+            <a:srgbClr val="A86CFF"/>
+          </a:solidFill>
+          <a:ln>
+            <a:noFill/>
+          </a:ln>
+        </p:spPr>
+        <p:style>
+          <a:lnRef idx="1">
+            <a:schemeClr val="accent1"/>
+          </a:lnRef>
+          <a:fillRef idx="3">
+            <a:schemeClr val="accent1"/>
+          </a:fillRef>
+          <a:effectRef idx="2">
+            <a:schemeClr val="accent1"/>
+          </a:effectRef>
+          <a:fontRef idx="minor">
+            <a:schemeClr val="lt1"/>
+          </a:fontRef>
+        </p:style>
+        <p:txBody>
+          <a:bodyPr rtlCol="0" anchor="ctr"/>
+          <a:lstStyle/>
+          <a:p>
+            <a:pPr algn="ctr"/>
+          </a:p>
+        </p:txBody>
+      </p:sp>
+      <p:sp>
+        <p:nvSpPr>
+          <p:cNvPr id="23" name="Oval 22"/>
+          <p:cNvSpPr/>
+          <p:nvPr/>
+        </p:nvSpPr>
+        <p:spPr>
+          <a:xfrm>
+            <a:off x="8953500" y="171450"/>
+            <a:ext cx="57150" cy="57150"/>
+          </a:xfrm>
+          <a:prstGeom prst="ellipse">
+            <a:avLst/>
+          </a:prstGeom>
+          <a:solidFill>
+            <a:srgbClr val="2ECC71"/>
+          </a:solidFill>
+          <a:ln>
+            <a:noFill/>
+          </a:ln>
+        </p:spPr>
+        <p:style>
+          <a:lnRef idx="1">
+            <a:schemeClr val="accent1"/>
+          </a:lnRef>
+          <a:fillRef idx="3">
+            <a:schemeClr val="accent1"/>
+          </a:fillRef>
+          <a:effectRef idx="2">
+            <a:schemeClr val="accent1"/>
+          </a:effectRef>
+          <a:fontRef idx="minor">
+            <a:schemeClr val="lt1"/>
+          </a:fontRef>
+        </p:style>
+        <p:txBody>
+          <a:bodyPr rtlCol="0" anchor="ctr"/>
+          <a:lstStyle/>
+          <a:p>
+            <a:pPr algn="ctr"/>
+          </a:p>
+        </p:txBody>
+      </p:sp>
+      <p:sp>
+        <p:nvSpPr>
+          <p:cNvPr id="24" name="Oval 23"/>
+          <p:cNvSpPr/>
+          <p:nvPr/>
+        </p:nvSpPr>
+        <p:spPr>
+          <a:xfrm>
+            <a:off x="9048750" y="171450"/>
+            <a:ext cx="57150" cy="57150"/>
+          </a:xfrm>
+          <a:prstGeom prst="ellipse">
+            <a:avLst/>
+          </a:prstGeom>
+          <a:solidFill>
+            <a:srgbClr val="FF6B6B"/>
+          </a:solidFill>
+          <a:ln>
+            <a:noFill/>
+          </a:ln>
+        </p:spPr>
+        <p:style>
+          <a:lnRef idx="1">
+            <a:schemeClr val="accent1"/>
+          </a:lnRef>
+          <a:fillRef idx="3">
+            <a:schemeClr val="accent1"/>
+          </a:fillRef>
+          <a:effectRef idx="2">
+            <a:schemeClr val="accent1"/>
+          </a:effectRef>
+          <a:fontRef idx="minor">
+            <a:schemeClr val="lt1"/>
+          </a:fontRef>
+        </p:style>
+        <p:txBody>
+          <a:bodyPr rtlCol="0" anchor="ctr"/>
+          <a:lstStyle/>
+          <a:p>
+            <a:pPr algn="ctr"/>
           </a:p>
         </p:txBody>
       </p:sp>
